--- a/assets/pptx/catalog-110.pptx
+++ b/assets/pptx/catalog-110.pptx
@@ -3295,7 +3295,7 @@
                 <a:ea typeface="Ebrima"/>
                 <a:cs typeface="Ebrima"/>
               </a:rPr>
-              <a:t>መተኪያና እኩያ የለህ (2x)</a:t>
+              <a:t>መተኪያና እኩያ የለህ 2x</a:t>
             </a:r>
           </a:p>
           <a:p>
@@ -3313,7 +3313,7 @@
                 <a:ea typeface="Ebrima"/>
                 <a:cs typeface="Ebrima"/>
               </a:rPr>
-              <a:t>ቃልህን እወደዋለሁ (2x)</a:t>
+              <a:t>ቃልህን እወደዋለሁ 2x</a:t>
             </a:r>
           </a:p>
           <a:p>
@@ -3331,7 +3331,7 @@
                 <a:ea typeface="Ebrima"/>
                 <a:cs typeface="Ebrima"/>
               </a:rPr>
-              <a:t>ድምጽህን እወደዋለሁ (2x)</a:t>
+              <a:t>ድምጽህን እወደዋለሁ 2x</a:t>
             </a:r>
           </a:p>
           <a:p>
@@ -3547,7 +3547,7 @@
                 <a:ea typeface="Ebrima"/>
                 <a:cs typeface="Ebrima"/>
               </a:rPr>
-              <a:t>መተኪያና እኩያ የለህ (2x)</a:t>
+              <a:t>መተኪያና እኩያ የለህ 2x</a:t>
             </a:r>
           </a:p>
           <a:p>
@@ -3565,7 +3565,7 @@
                 <a:ea typeface="Ebrima"/>
                 <a:cs typeface="Ebrima"/>
               </a:rPr>
-              <a:t>ቃልህን እወደዋለሁ (2x)</a:t>
+              <a:t>ቃልህን እወደዋለሁ 2x</a:t>
             </a:r>
           </a:p>
           <a:p>
@@ -3583,7 +3583,7 @@
                 <a:ea typeface="Ebrima"/>
                 <a:cs typeface="Ebrima"/>
               </a:rPr>
-              <a:t>ድምጽህን እወደዋለሁ (2x)</a:t>
+              <a:t>ድምጽህን እወደዋለሁ 2x</a:t>
             </a:r>
           </a:p>
           <a:p>
@@ -3799,7 +3799,7 @@
                 <a:ea typeface="Ebrima"/>
                 <a:cs typeface="Ebrima"/>
               </a:rPr>
-              <a:t>መተኪያና እኩያ የለህ (2x)</a:t>
+              <a:t>መተኪያና እኩያ የለህ 2x</a:t>
             </a:r>
           </a:p>
           <a:p>
@@ -3817,7 +3817,7 @@
                 <a:ea typeface="Ebrima"/>
                 <a:cs typeface="Ebrima"/>
               </a:rPr>
-              <a:t>ቃልህን እወደዋለሁ (2x)</a:t>
+              <a:t>ቃልህን እወደዋለሁ 2x</a:t>
             </a:r>
           </a:p>
         </p:txBody>
